--- a/slides/release/07-capstone.pptx
+++ b/slides/release/07-capstone.pptx
@@ -2550,7 +2550,7 @@
         </p:nvSpPr>
         <p:spPr>
           <a:xfrm>
-            <a:off x="419100" y="6444906"/>
+            <a:off x="495300" y="6532040"/>
             <a:ext cx="7507224" cy="877824"/>
           </a:xfrm>
           <a:prstGeom prst="rect">
@@ -2795,7 +2795,7 @@
         </p:nvSpPr>
         <p:spPr>
           <a:xfrm>
-            <a:off x="704088" y="6599699"/>
+            <a:off x="704088" y="6881022"/>
             <a:ext cx="7507224" cy="877824"/>
           </a:xfrm>
           <a:prstGeom prst="rect">
@@ -3018,7 +3018,7 @@
         </p:nvSpPr>
         <p:spPr>
           <a:xfrm>
-            <a:off x="685038" y="6627481"/>
+            <a:off x="704088" y="6459194"/>
             <a:ext cx="7507224" cy="877824"/>
           </a:xfrm>
           <a:prstGeom prst="rect">
@@ -3225,7 +3225,7 @@
         </p:nvSpPr>
         <p:spPr>
           <a:xfrm>
-            <a:off x="495300" y="6282531"/>
+            <a:off x="704088" y="6356483"/>
             <a:ext cx="7507224" cy="877824"/>
           </a:xfrm>
           <a:prstGeom prst="rect">
@@ -3399,7 +3399,7 @@
               <a:t> Package</a:t>
             </a:r>
             <a:r>
-              <a:t> the winner as a library entry, saved as a Project / Custom GPT / Gem.</a:t>
+              <a:t> the winner as a library entry, saved as a Custom GPT / Project / Gem.</a:t>
             </a:r>
           </a:p>
           <a:p>
@@ -3559,15 +3559,25 @@
             </a:r>
             <a:r>
               <a:rPr b="1"/>
-              <a:t> your own account</a:t>
-            </a:r>
-            <a:r>
-              <a:t> — Claude, ChatGPT, or Gemini.</a:t>
+              <a:t> ChatGPT Enterprise</a:t>
+            </a:r>
+            <a:r>
+              <a:t> (our Business workspace) — Claude or Gemini also work.</a:t>
             </a:r>
           </a:p>
           <a:p>
             <a:r>
               <a:t> Save the final version where it's reusable:</a:t>
+            </a:r>
+          </a:p>
+          <a:p>
+            <a:pPr lvl="1"/>
+            <a:r>
+              <a:rPr b="1"/>
+              <a:t> ChatGPT → a Custom GPT / Project</a:t>
+            </a:r>
+            <a:r>
+              <a:t> — role and files baked in.</a:t>
             </a:r>
           </a:p>
           <a:p>
@@ -3578,16 +3588,6 @@
             </a:r>
             <a:r>
               <a:t> — source material and instructions attached.</a:t>
-            </a:r>
-          </a:p>
-          <a:p>
-            <a:pPr lvl="1"/>
-            <a:r>
-              <a:rPr b="1"/>
-              <a:t> ChatGPT → a Custom GPT</a:t>
-            </a:r>
-            <a:r>
-              <a:t> — role and files baked in.</a:t>
             </a:r>
           </a:p>
           <a:p>
@@ -3658,7 +3658,7 @@
         </p:nvSpPr>
         <p:spPr>
           <a:xfrm>
-            <a:off x="495300" y="6739731"/>
+            <a:off x="704088" y="6425063"/>
             <a:ext cx="7507224" cy="877824"/>
           </a:xfrm>
           <a:prstGeom prst="rect">
@@ -3698,7 +3698,7 @@
                   <a:srgbClr val="333333"/>
                 </a:solidFill>
               </a:rPr>
-              <a:t>A prompt you paste from a doc each time is a draft. A saved Project/GPT/Gem is a product.</a:t>
+              <a:t>A prompt you paste from a doc each time is a draft. A saved Custom GPT/Project is a product.</a:t>
             </a:r>
           </a:p>
         </p:txBody>
@@ -3880,7 +3880,7 @@
         </p:nvSpPr>
         <p:spPr>
           <a:xfrm>
-            <a:off x="571500" y="6863975"/>
+            <a:off x="704088" y="6627481"/>
             <a:ext cx="7507224" cy="877824"/>
           </a:xfrm>
           <a:prstGeom prst="rect">
@@ -4076,7 +4076,7 @@
         </p:nvSpPr>
         <p:spPr>
           <a:xfrm>
-            <a:off x="419100" y="6282531"/>
+            <a:off x="704088" y="4864608"/>
             <a:ext cx="7507224" cy="877824"/>
           </a:xfrm>
           <a:prstGeom prst="rect">
@@ -4294,7 +4294,7 @@
         </p:nvSpPr>
         <p:spPr>
           <a:xfrm>
-            <a:off x="704088" y="5596731"/>
+            <a:off x="704088" y="4425696"/>
             <a:ext cx="7507224" cy="1316736"/>
           </a:xfrm>
           <a:prstGeom prst="rect">
